--- a/modulo-01/01.08 - Descrevendo o Modelo de Programação ABAP RESTful (RAP)/01.08_Arquiteto_de_Software_Dominando_ABAP_RAP.pptx
+++ b/modulo-01/01.08 - Descrevendo o Modelo de Programação ABAP RESTful (RAP)/01.08_Arquiteto_de_Software_Dominando_ABAP_RAP.pptx
@@ -10475,8 +10475,8 @@
         </p:blipFill>
         <p:spPr>
           <a:xfrm>
-            <a:off x="8399069" y="2661412"/>
-            <a:ext cx="256032" cy="256032"/>
+            <a:off x="749808" y="5019548"/>
+            <a:ext cx="310896" cy="310896"/>
           </a:xfrm>
           <a:prstGeom prst="rect">
             <a:avLst/>
@@ -10499,8 +10499,8 @@
         </p:blipFill>
         <p:spPr>
           <a:xfrm>
-            <a:off x="749808" y="5019548"/>
-            <a:ext cx="310896" cy="310896"/>
+            <a:off x="8399069" y="2661412"/>
+            <a:ext cx="256032" cy="256032"/>
           </a:xfrm>
           <a:prstGeom prst="rect">
             <a:avLst/>
@@ -14502,7 +14502,7 @@
         </p:blipFill>
         <p:spPr>
           <a:xfrm>
-            <a:off x="822960" y="3886200"/>
+            <a:off x="6355080" y="2926080"/>
             <a:ext cx="256032" cy="256032"/>
           </a:xfrm>
           <a:prstGeom prst="rect">
@@ -14526,7 +14526,7 @@
         </p:blipFill>
         <p:spPr>
           <a:xfrm>
-            <a:off x="6355080" y="2926080"/>
+            <a:off x="822960" y="3886200"/>
             <a:ext cx="256032" cy="256032"/>
           </a:xfrm>
           <a:prstGeom prst="rect">
@@ -14550,8 +14550,8 @@
         </p:blipFill>
         <p:spPr>
           <a:xfrm>
-            <a:off x="6355080" y="3886200"/>
-            <a:ext cx="256032" cy="256032"/>
+            <a:off x="960120" y="5541264"/>
+            <a:ext cx="365760" cy="365760"/>
           </a:xfrm>
           <a:prstGeom prst="rect">
             <a:avLst/>
@@ -14574,8 +14574,8 @@
         </p:blipFill>
         <p:spPr>
           <a:xfrm>
-            <a:off x="960120" y="5541264"/>
-            <a:ext cx="365760" cy="365760"/>
+            <a:off x="6355080" y="3886200"/>
+            <a:ext cx="256032" cy="256032"/>
           </a:xfrm>
           <a:prstGeom prst="rect">
             <a:avLst/>
@@ -16191,7 +16191,7 @@
         </p:blipFill>
         <p:spPr>
           <a:xfrm>
-            <a:off x="2636444" y="3858768"/>
+            <a:off x="11094415" y="1847088"/>
             <a:ext cx="347472" cy="347472"/>
           </a:xfrm>
           <a:prstGeom prst="rect">
@@ -16215,7 +16215,7 @@
         </p:blipFill>
         <p:spPr>
           <a:xfrm>
-            <a:off x="11094415" y="1847088"/>
+            <a:off x="2636444" y="3858768"/>
             <a:ext cx="347472" cy="347472"/>
           </a:xfrm>
           <a:prstGeom prst="rect">
